--- a/rawDocument/OOP_Final_Project.pptx
+++ b/rawDocument/OOP_Final_Project.pptx
@@ -822,7 +822,7 @@
   <p:cSld>
     <p:spTree>
       <p:nvGrpSpPr>
-        <p:cNvPr id="113" name="Shape 113"/>
+        <p:cNvPr id="112" name="Shape 112"/>
         <p:cNvGrpSpPr/>
         <p:nvPr/>
       </p:nvGrpSpPr>
@@ -836,7 +836,7 @@
       </p:grpSpPr>
       <p:sp>
         <p:nvSpPr>
-          <p:cNvPr id="114" name="Google Shape;114;g3997af2fcc2_0_1:notes"/>
+          <p:cNvPr id="113" name="Google Shape;113;g3997af2fcc2_0_1:notes"/>
           <p:cNvSpPr/>
           <p:nvPr>
             <p:ph idx="2" type="sldImg"/>
@@ -871,7 +871,7 @@
       </p:sp>
       <p:sp>
         <p:nvSpPr>
-          <p:cNvPr id="115" name="Google Shape;115;g3997af2fcc2_0_1:notes"/>
+          <p:cNvPr id="114" name="Google Shape;114;g3997af2fcc2_0_1:notes"/>
           <p:cNvSpPr txBox="1"/>
           <p:nvPr>
             <p:ph idx="1" type="body"/>
@@ -921,7 +921,7 @@
   <p:cSld>
     <p:spTree>
       <p:nvGrpSpPr>
-        <p:cNvPr id="128" name="Shape 128"/>
+        <p:cNvPr id="127" name="Shape 127"/>
         <p:cNvGrpSpPr/>
         <p:nvPr/>
       </p:nvGrpSpPr>
@@ -935,7 +935,7 @@
       </p:grpSpPr>
       <p:sp>
         <p:nvSpPr>
-          <p:cNvPr id="129" name="Google Shape;129;g391c96e0603_0_56:notes"/>
+          <p:cNvPr id="128" name="Google Shape;128;g391c96e0603_0_56:notes"/>
           <p:cNvSpPr/>
           <p:nvPr>
             <p:ph idx="2" type="sldImg"/>
@@ -970,7 +970,7 @@
       </p:sp>
       <p:sp>
         <p:nvSpPr>
-          <p:cNvPr id="130" name="Google Shape;130;g391c96e0603_0_56:notes"/>
+          <p:cNvPr id="129" name="Google Shape;129;g391c96e0603_0_56:notes"/>
           <p:cNvSpPr txBox="1"/>
           <p:nvPr>
             <p:ph idx="1" type="body"/>
@@ -1020,7 +1020,7 @@
   <p:cSld>
     <p:spTree>
       <p:nvGrpSpPr>
-        <p:cNvPr id="136" name="Shape 136"/>
+        <p:cNvPr id="135" name="Shape 135"/>
         <p:cNvGrpSpPr/>
         <p:nvPr/>
       </p:nvGrpSpPr>
@@ -1034,7 +1034,7 @@
       </p:grpSpPr>
       <p:sp>
         <p:nvSpPr>
-          <p:cNvPr id="137" name="Google Shape;137;g54dda1946d_0_3:notes"/>
+          <p:cNvPr id="136" name="Google Shape;136;g54dda1946d_0_3:notes"/>
           <p:cNvSpPr/>
           <p:nvPr>
             <p:ph idx="2" type="sldImg"/>
@@ -1069,7 +1069,7 @@
       </p:sp>
       <p:sp>
         <p:nvSpPr>
-          <p:cNvPr id="138" name="Google Shape;138;g54dda1946d_0_3:notes"/>
+          <p:cNvPr id="137" name="Google Shape;137;g54dda1946d_0_3:notes"/>
           <p:cNvSpPr txBox="1"/>
           <p:nvPr>
             <p:ph idx="1" type="body"/>
@@ -1119,7 +1119,7 @@
   <p:cSld>
     <p:spTree>
       <p:nvGrpSpPr>
-        <p:cNvPr id="168" name="Shape 168"/>
+        <p:cNvPr id="167" name="Shape 167"/>
         <p:cNvGrpSpPr/>
         <p:nvPr/>
       </p:nvGrpSpPr>
@@ -1133,7 +1133,7 @@
       </p:grpSpPr>
       <p:sp>
         <p:nvSpPr>
-          <p:cNvPr id="169" name="Google Shape;169;g391c96e0603_0_71:notes"/>
+          <p:cNvPr id="168" name="Google Shape;168;g391c96e0603_0_71:notes"/>
           <p:cNvSpPr/>
           <p:nvPr>
             <p:ph idx="2" type="sldImg"/>
@@ -1168,7 +1168,7 @@
       </p:sp>
       <p:sp>
         <p:nvSpPr>
-          <p:cNvPr id="170" name="Google Shape;170;g391c96e0603_0_71:notes"/>
+          <p:cNvPr id="169" name="Google Shape;169;g391c96e0603_0_71:notes"/>
           <p:cNvSpPr txBox="1"/>
           <p:nvPr>
             <p:ph idx="1" type="body"/>
@@ -1218,7 +1218,7 @@
   <p:cSld>
     <p:spTree>
       <p:nvGrpSpPr>
-        <p:cNvPr id="175" name="Shape 175"/>
+        <p:cNvPr id="174" name="Shape 174"/>
         <p:cNvGrpSpPr/>
         <p:nvPr/>
       </p:nvGrpSpPr>
@@ -1232,7 +1232,7 @@
       </p:grpSpPr>
       <p:sp>
         <p:nvSpPr>
-          <p:cNvPr id="176" name="Google Shape;176;g391c96e0603_0_97:notes"/>
+          <p:cNvPr id="175" name="Google Shape;175;g391c96e0603_0_97:notes"/>
           <p:cNvSpPr/>
           <p:nvPr>
             <p:ph idx="2" type="sldImg"/>
@@ -1267,7 +1267,7 @@
       </p:sp>
       <p:sp>
         <p:nvSpPr>
-          <p:cNvPr id="177" name="Google Shape;177;g391c96e0603_0_97:notes"/>
+          <p:cNvPr id="176" name="Google Shape;176;g391c96e0603_0_97:notes"/>
           <p:cNvSpPr txBox="1"/>
           <p:nvPr>
             <p:ph idx="1" type="body"/>
@@ -16240,64 +16240,6 @@
           </a:p>
         </p:txBody>
       </p:sp>
-      <p:sp>
-        <p:nvSpPr>
-          <p:cNvPr id="112" name="Google Shape;112;p22"/>
-          <p:cNvSpPr txBox="1"/>
-          <p:nvPr/>
-        </p:nvSpPr>
-        <p:spPr>
-          <a:xfrm>
-            <a:off x="7689003" y="228600"/>
-            <a:ext cx="1226400" cy="338700"/>
-          </a:xfrm>
-          <a:prstGeom prst="rect">
-            <a:avLst/>
-          </a:prstGeom>
-          <a:noFill/>
-          <a:ln>
-            <a:noFill/>
-          </a:ln>
-        </p:spPr>
-        <p:txBody>
-          <a:bodyPr anchorCtr="0" anchor="ctr" bIns="0" lIns="0" spcFirstLastPara="1" rIns="0" wrap="square" tIns="0">
-            <a:noAutofit/>
-          </a:bodyPr>
-          <a:lstStyle/>
-          <a:p>
-            <a:pPr indent="0" lvl="0" marL="0" rtl="0" algn="r">
-              <a:spcBef>
-                <a:spcPts val="0"/>
-              </a:spcBef>
-              <a:spcAft>
-                <a:spcPts val="0"/>
-              </a:spcAft>
-              <a:buNone/>
-            </a:pPr>
-            <a:r>
-              <a:rPr lang="en" sz="1000">
-                <a:solidFill>
-                  <a:schemeClr val="dk1"/>
-                </a:solidFill>
-                <a:latin typeface="Heebo"/>
-                <a:ea typeface="Heebo"/>
-                <a:cs typeface="Heebo"/>
-                <a:sym typeface="Heebo"/>
-              </a:rPr>
-              <a:t>01</a:t>
-            </a:r>
-            <a:endParaRPr sz="1000">
-              <a:solidFill>
-                <a:schemeClr val="dk1"/>
-              </a:solidFill>
-              <a:latin typeface="Heebo"/>
-              <a:ea typeface="Heebo"/>
-              <a:cs typeface="Heebo"/>
-              <a:sym typeface="Heebo"/>
-            </a:endParaRPr>
-          </a:p>
-        </p:txBody>
-      </p:sp>
     </p:spTree>
   </p:cSld>
   <p:clrMapOvr>
@@ -16311,7 +16253,7 @@
   <p:cSld>
     <p:spTree>
       <p:nvGrpSpPr>
-        <p:cNvPr id="116" name="Shape 116"/>
+        <p:cNvPr id="115" name="Shape 115"/>
         <p:cNvGrpSpPr/>
         <p:nvPr/>
       </p:nvGrpSpPr>
@@ -16325,7 +16267,7 @@
       </p:grpSpPr>
       <p:sp>
         <p:nvSpPr>
-          <p:cNvPr id="117" name="Google Shape;117;p23"/>
+          <p:cNvPr id="116" name="Google Shape;116;p23"/>
           <p:cNvSpPr txBox="1"/>
           <p:nvPr>
             <p:ph type="title"/>
@@ -16365,7 +16307,7 @@
       </p:sp>
       <p:sp>
         <p:nvSpPr>
-          <p:cNvPr id="118" name="Google Shape;118;p23"/>
+          <p:cNvPr id="117" name="Google Shape;117;p23"/>
           <p:cNvSpPr txBox="1"/>
           <p:nvPr/>
         </p:nvSpPr>
@@ -16423,7 +16365,7 @@
       </p:sp>
       <p:pic>
         <p:nvPicPr>
-          <p:cNvPr id="119" name="Google Shape;119;p23" title="mountain_car.gif"/>
+          <p:cNvPr id="118" name="Google Shape;118;p23" title="mountain_car.gif"/>
           <p:cNvPicPr preferRelativeResize="0"/>
           <p:nvPr/>
         </p:nvPicPr>
@@ -16451,7 +16393,7 @@
       </p:pic>
       <p:sp>
         <p:nvSpPr>
-          <p:cNvPr id="120" name="Google Shape;120;p23"/>
+          <p:cNvPr id="119" name="Google Shape;119;p23"/>
           <p:cNvSpPr txBox="1"/>
           <p:nvPr/>
         </p:nvSpPr>
@@ -16509,7 +16451,7 @@
       </p:sp>
       <p:pic>
         <p:nvPicPr>
-          <p:cNvPr id="121" name="Google Shape;121;p23"/>
+          <p:cNvPr id="120" name="Google Shape;120;p23"/>
           <p:cNvPicPr preferRelativeResize="0"/>
           <p:nvPr/>
         </p:nvPicPr>
@@ -16537,7 +16479,7 @@
       </p:pic>
       <p:sp>
         <p:nvSpPr>
-          <p:cNvPr id="122" name="Google Shape;122;p23"/>
+          <p:cNvPr id="121" name="Google Shape;121;p23"/>
           <p:cNvSpPr txBox="1"/>
           <p:nvPr/>
         </p:nvSpPr>
@@ -16595,7 +16537,7 @@
       </p:sp>
       <p:pic>
         <p:nvPicPr>
-          <p:cNvPr id="123" name="Google Shape;123;p23"/>
+          <p:cNvPr id="122" name="Google Shape;122;p23"/>
           <p:cNvPicPr preferRelativeResize="0"/>
           <p:nvPr/>
         </p:nvPicPr>
@@ -16622,7 +16564,7 @@
       </p:pic>
       <p:sp>
         <p:nvSpPr>
-          <p:cNvPr id="124" name="Google Shape;124;p23"/>
+          <p:cNvPr id="123" name="Google Shape;123;p23"/>
           <p:cNvSpPr txBox="1"/>
           <p:nvPr/>
         </p:nvSpPr>
@@ -16685,7 +16627,7 @@
       </p:sp>
       <p:grpSp>
         <p:nvGrpSpPr>
-          <p:cNvPr id="125" name="Google Shape;125;p23"/>
+          <p:cNvPr id="124" name="Google Shape;124;p23"/>
           <p:cNvGrpSpPr/>
           <p:nvPr/>
         </p:nvGrpSpPr>
@@ -16699,7 +16641,7 @@
         </p:grpSpPr>
         <p:pic>
           <p:nvPicPr>
-            <p:cNvPr id="126" name="Google Shape;126;p23"/>
+            <p:cNvPr id="125" name="Google Shape;125;p23"/>
             <p:cNvPicPr preferRelativeResize="0"/>
             <p:nvPr/>
           </p:nvPicPr>
@@ -16727,7 +16669,7 @@
         </p:pic>
         <p:sp>
           <p:nvSpPr>
-            <p:cNvPr id="127" name="Google Shape;127;p23"/>
+            <p:cNvPr id="126" name="Google Shape;126;p23"/>
             <p:cNvSpPr txBox="1"/>
             <p:nvPr/>
           </p:nvSpPr>
@@ -16797,7 +16739,7 @@
   <p:cSld>
     <p:spTree>
       <p:nvGrpSpPr>
-        <p:cNvPr id="131" name="Shape 131"/>
+        <p:cNvPr id="130" name="Shape 130"/>
         <p:cNvGrpSpPr/>
         <p:nvPr/>
       </p:nvGrpSpPr>
@@ -16811,7 +16753,7 @@
       </p:grpSpPr>
       <p:sp>
         <p:nvSpPr>
-          <p:cNvPr id="132" name="Google Shape;132;p24"/>
+          <p:cNvPr id="131" name="Google Shape;131;p24"/>
           <p:cNvSpPr txBox="1"/>
           <p:nvPr>
             <p:ph idx="1" type="subTitle"/>
@@ -16854,7 +16796,7 @@
       </p:sp>
       <p:sp>
         <p:nvSpPr>
-          <p:cNvPr id="133" name="Google Shape;133;p24"/>
+          <p:cNvPr id="132" name="Google Shape;132;p24"/>
           <p:cNvSpPr txBox="1"/>
           <p:nvPr>
             <p:ph type="title"/>
@@ -16894,7 +16836,7 @@
       </p:sp>
       <p:pic>
         <p:nvPicPr>
-          <p:cNvPr id="134" name="Google Shape;134;p24"/>
+          <p:cNvPr id="133" name="Google Shape;133;p24"/>
           <p:cNvPicPr preferRelativeResize="0"/>
           <p:nvPr/>
         </p:nvPicPr>
@@ -16922,7 +16864,7 @@
       </p:pic>
       <p:pic>
         <p:nvPicPr>
-          <p:cNvPr id="135" name="Google Shape;135;p24"/>
+          <p:cNvPr id="134" name="Google Shape;134;p24"/>
           <p:cNvPicPr preferRelativeResize="0"/>
           <p:nvPr/>
         </p:nvPicPr>
@@ -16961,7 +16903,7 @@
   <p:cSld>
     <p:spTree>
       <p:nvGrpSpPr>
-        <p:cNvPr id="139" name="Shape 139"/>
+        <p:cNvPr id="138" name="Shape 138"/>
         <p:cNvGrpSpPr/>
         <p:nvPr/>
       </p:nvGrpSpPr>
@@ -16975,7 +16917,7 @@
       </p:grpSpPr>
       <p:sp>
         <p:nvSpPr>
-          <p:cNvPr id="140" name="Google Shape;140;p25"/>
+          <p:cNvPr id="139" name="Google Shape;139;p25"/>
           <p:cNvSpPr txBox="1"/>
           <p:nvPr>
             <p:ph type="title"/>
@@ -17020,7 +16962,7 @@
       </p:sp>
       <p:sp>
         <p:nvSpPr>
-          <p:cNvPr id="141" name="Google Shape;141;p25"/>
+          <p:cNvPr id="140" name="Google Shape;140;p25"/>
           <p:cNvSpPr/>
           <p:nvPr/>
         </p:nvSpPr>
@@ -17080,7 +17022,7 @@
       </p:sp>
       <p:sp>
         <p:nvSpPr>
-          <p:cNvPr id="142" name="Google Shape;142;p25"/>
+          <p:cNvPr id="141" name="Google Shape;141;p25"/>
           <p:cNvSpPr/>
           <p:nvPr/>
         </p:nvSpPr>
@@ -17140,7 +17082,7 @@
       </p:sp>
       <p:sp>
         <p:nvSpPr>
-          <p:cNvPr id="143" name="Google Shape;143;p25"/>
+          <p:cNvPr id="142" name="Google Shape;142;p25"/>
           <p:cNvSpPr/>
           <p:nvPr/>
         </p:nvSpPr>
@@ -17200,10 +17142,10 @@
       </p:sp>
       <p:cxnSp>
         <p:nvCxnSpPr>
-          <p:cNvPr id="144" name="Google Shape;144;p25"/>
+          <p:cNvPr id="143" name="Google Shape;143;p25"/>
           <p:cNvCxnSpPr>
-            <a:stCxn id="141" idx="2"/>
-            <a:endCxn id="142" idx="0"/>
+            <a:stCxn id="140" idx="2"/>
+            <a:endCxn id="141" idx="0"/>
           </p:cNvCxnSpPr>
           <p:nvPr/>
         </p:nvCxnSpPr>
@@ -17229,7 +17171,7 @@
       </p:cxnSp>
       <p:sp>
         <p:nvSpPr>
-          <p:cNvPr id="145" name="Google Shape;145;p25"/>
+          <p:cNvPr id="144" name="Google Shape;144;p25"/>
           <p:cNvSpPr/>
           <p:nvPr/>
         </p:nvSpPr>
@@ -17289,7 +17231,7 @@
       </p:sp>
       <p:sp>
         <p:nvSpPr>
-          <p:cNvPr id="146" name="Google Shape;146;p25"/>
+          <p:cNvPr id="145" name="Google Shape;145;p25"/>
           <p:cNvSpPr/>
           <p:nvPr/>
         </p:nvSpPr>
@@ -17349,10 +17291,10 @@
       </p:sp>
       <p:cxnSp>
         <p:nvCxnSpPr>
-          <p:cNvPr id="147" name="Google Shape;147;p25"/>
+          <p:cNvPr id="146" name="Google Shape;146;p25"/>
           <p:cNvCxnSpPr>
-            <a:stCxn id="145" idx="2"/>
-            <a:endCxn id="146" idx="0"/>
+            <a:stCxn id="144" idx="2"/>
+            <a:endCxn id="145" idx="0"/>
           </p:cNvCxnSpPr>
           <p:nvPr/>
         </p:nvCxnSpPr>
@@ -17378,9 +17320,9 @@
       </p:cxnSp>
       <p:cxnSp>
         <p:nvCxnSpPr>
-          <p:cNvPr id="148" name="Google Shape;148;p25"/>
+          <p:cNvPr id="147" name="Google Shape;147;p25"/>
           <p:cNvCxnSpPr>
-            <a:stCxn id="146" idx="2"/>
+            <a:stCxn id="145" idx="2"/>
           </p:cNvCxnSpPr>
           <p:nvPr/>
         </p:nvCxnSpPr>
@@ -17406,7 +17348,7 @@
       </p:cxnSp>
       <p:grpSp>
         <p:nvGrpSpPr>
-          <p:cNvPr id="149" name="Google Shape;149;p25"/>
+          <p:cNvPr id="148" name="Google Shape;148;p25"/>
           <p:cNvGrpSpPr/>
           <p:nvPr/>
         </p:nvGrpSpPr>
@@ -17420,7 +17362,7 @@
         </p:grpSpPr>
         <p:sp>
           <p:nvSpPr>
-            <p:cNvPr id="150" name="Google Shape;150;p25"/>
+            <p:cNvPr id="149" name="Google Shape;149;p25"/>
             <p:cNvSpPr/>
             <p:nvPr/>
           </p:nvSpPr>
@@ -17480,7 +17422,7 @@
         </p:sp>
         <p:sp>
           <p:nvSpPr>
-            <p:cNvPr id="151" name="Google Shape;151;p25"/>
+            <p:cNvPr id="150" name="Google Shape;150;p25"/>
             <p:cNvSpPr/>
             <p:nvPr/>
           </p:nvSpPr>
@@ -17540,9 +17482,9 @@
         </p:sp>
         <p:cxnSp>
           <p:nvCxnSpPr>
-            <p:cNvPr id="152" name="Google Shape;152;p25"/>
+            <p:cNvPr id="151" name="Google Shape;151;p25"/>
             <p:cNvCxnSpPr>
-              <a:endCxn id="151" idx="0"/>
+              <a:endCxn id="150" idx="0"/>
             </p:cNvCxnSpPr>
             <p:nvPr/>
           </p:nvCxnSpPr>
@@ -17568,7 +17510,7 @@
         </p:cxnSp>
         <p:cxnSp>
           <p:nvCxnSpPr>
-            <p:cNvPr id="153" name="Google Shape;153;p25"/>
+            <p:cNvPr id="152" name="Google Shape;152;p25"/>
             <p:cNvCxnSpPr/>
             <p:nvPr/>
           </p:nvCxnSpPr>
@@ -17594,7 +17536,7 @@
         </p:cxnSp>
         <p:sp>
           <p:nvSpPr>
-            <p:cNvPr id="154" name="Google Shape;154;p25"/>
+            <p:cNvPr id="153" name="Google Shape;153;p25"/>
             <p:cNvSpPr/>
             <p:nvPr/>
           </p:nvSpPr>
@@ -17654,7 +17596,7 @@
         </p:sp>
         <p:sp>
           <p:nvSpPr>
-            <p:cNvPr id="155" name="Google Shape;155;p25"/>
+            <p:cNvPr id="154" name="Google Shape;154;p25"/>
             <p:cNvSpPr/>
             <p:nvPr/>
           </p:nvSpPr>
@@ -17714,7 +17656,7 @@
         </p:sp>
         <p:cxnSp>
           <p:nvCxnSpPr>
-            <p:cNvPr id="156" name="Google Shape;156;p25"/>
+            <p:cNvPr id="155" name="Google Shape;155;p25"/>
             <p:cNvCxnSpPr/>
             <p:nvPr/>
           </p:nvCxnSpPr>
@@ -17740,10 +17682,10 @@
         </p:cxnSp>
         <p:cxnSp>
           <p:nvCxnSpPr>
-            <p:cNvPr id="157" name="Google Shape;157;p25"/>
+            <p:cNvPr id="156" name="Google Shape;156;p25"/>
             <p:cNvCxnSpPr>
-              <a:stCxn id="143" idx="2"/>
-              <a:endCxn id="150" idx="0"/>
+              <a:stCxn id="142" idx="2"/>
+              <a:endCxn id="149" idx="0"/>
             </p:cNvCxnSpPr>
             <p:nvPr/>
           </p:nvCxnSpPr>
@@ -17772,7 +17714,7 @@
       </p:grpSp>
       <p:sp>
         <p:nvSpPr>
-          <p:cNvPr id="158" name="Google Shape;158;p25"/>
+          <p:cNvPr id="157" name="Google Shape;157;p25"/>
           <p:cNvSpPr/>
           <p:nvPr/>
         </p:nvSpPr>
@@ -17832,9 +17774,9 @@
       </p:sp>
       <p:cxnSp>
         <p:nvCxnSpPr>
-          <p:cNvPr id="159" name="Google Shape;159;p25"/>
+          <p:cNvPr id="158" name="Google Shape;158;p25"/>
           <p:cNvCxnSpPr>
-            <a:stCxn id="158" idx="2"/>
+            <a:stCxn id="157" idx="2"/>
           </p:cNvCxnSpPr>
           <p:nvPr/>
         </p:nvCxnSpPr>
@@ -17860,10 +17802,10 @@
       </p:cxnSp>
       <p:cxnSp>
         <p:nvCxnSpPr>
-          <p:cNvPr id="160" name="Google Shape;160;p25"/>
+          <p:cNvPr id="159" name="Google Shape;159;p25"/>
           <p:cNvCxnSpPr>
-            <a:stCxn id="142" idx="2"/>
-            <a:endCxn id="143" idx="0"/>
+            <a:stCxn id="141" idx="2"/>
+            <a:endCxn id="142" idx="0"/>
           </p:cNvCxnSpPr>
           <p:nvPr/>
         </p:nvCxnSpPr>
@@ -17893,7 +17835,7 @@
       </p:cxnSp>
       <p:sp>
         <p:nvSpPr>
-          <p:cNvPr id="161" name="Google Shape;161;p25"/>
+          <p:cNvPr id="160" name="Google Shape;160;p25"/>
           <p:cNvSpPr txBox="1"/>
           <p:nvPr/>
         </p:nvSpPr>
@@ -17945,7 +17887,7 @@
       </p:sp>
       <p:sp>
         <p:nvSpPr>
-          <p:cNvPr id="162" name="Google Shape;162;p25"/>
+          <p:cNvPr id="161" name="Google Shape;161;p25"/>
           <p:cNvSpPr/>
           <p:nvPr/>
         </p:nvSpPr>
@@ -18005,7 +17947,7 @@
       </p:sp>
       <p:sp>
         <p:nvSpPr>
-          <p:cNvPr id="163" name="Google Shape;163;p25"/>
+          <p:cNvPr id="162" name="Google Shape;162;p25"/>
           <p:cNvSpPr/>
           <p:nvPr/>
         </p:nvSpPr>
@@ -18065,10 +18007,10 @@
       </p:sp>
       <p:cxnSp>
         <p:nvCxnSpPr>
-          <p:cNvPr id="164" name="Google Shape;164;p25"/>
+          <p:cNvPr id="163" name="Google Shape;163;p25"/>
           <p:cNvCxnSpPr>
-            <a:stCxn id="163" idx="0"/>
-            <a:endCxn id="162" idx="0"/>
+            <a:stCxn id="162" idx="0"/>
+            <a:endCxn id="161" idx="0"/>
           </p:cNvCxnSpPr>
           <p:nvPr/>
         </p:nvCxnSpPr>
@@ -18096,10 +18038,10 @@
       </p:cxnSp>
       <p:cxnSp>
         <p:nvCxnSpPr>
-          <p:cNvPr id="165" name="Google Shape;165;p25"/>
+          <p:cNvPr id="164" name="Google Shape;164;p25"/>
           <p:cNvCxnSpPr>
-            <a:stCxn id="163" idx="2"/>
-            <a:endCxn id="162" idx="2"/>
+            <a:stCxn id="162" idx="2"/>
+            <a:endCxn id="161" idx="2"/>
           </p:cNvCxnSpPr>
           <p:nvPr/>
         </p:nvCxnSpPr>
@@ -18127,7 +18069,7 @@
       </p:cxnSp>
       <p:sp>
         <p:nvSpPr>
-          <p:cNvPr id="166" name="Google Shape;166;p25"/>
+          <p:cNvPr id="165" name="Google Shape;165;p25"/>
           <p:cNvSpPr txBox="1"/>
           <p:nvPr/>
         </p:nvSpPr>
@@ -18185,7 +18127,7 @@
       </p:sp>
       <p:sp>
         <p:nvSpPr>
-          <p:cNvPr id="167" name="Google Shape;167;p25"/>
+          <p:cNvPr id="166" name="Google Shape;166;p25"/>
           <p:cNvSpPr txBox="1"/>
           <p:nvPr/>
         </p:nvSpPr>
@@ -18254,7 +18196,7 @@
   <p:cSld>
     <p:spTree>
       <p:nvGrpSpPr>
-        <p:cNvPr id="171" name="Shape 171"/>
+        <p:cNvPr id="170" name="Shape 170"/>
         <p:cNvGrpSpPr/>
         <p:nvPr/>
       </p:nvGrpSpPr>
@@ -18268,7 +18210,7 @@
       </p:grpSpPr>
       <p:sp>
         <p:nvSpPr>
-          <p:cNvPr id="172" name="Google Shape;172;p26"/>
+          <p:cNvPr id="171" name="Google Shape;171;p26"/>
           <p:cNvSpPr txBox="1"/>
           <p:nvPr>
             <p:ph type="title"/>
@@ -18313,7 +18255,7 @@
       </p:sp>
       <p:pic>
         <p:nvPicPr>
-          <p:cNvPr id="173" name="Google Shape;173;p26"/>
+          <p:cNvPr id="172" name="Google Shape;172;p26"/>
           <p:cNvPicPr preferRelativeResize="0"/>
           <p:nvPr/>
         </p:nvPicPr>
@@ -18340,7 +18282,7 @@
       </p:pic>
       <p:pic>
         <p:nvPicPr>
-          <p:cNvPr id="174" name="Google Shape;174;p26"/>
+          <p:cNvPr id="173" name="Google Shape;173;p26"/>
           <p:cNvPicPr preferRelativeResize="0"/>
           <p:nvPr/>
         </p:nvPicPr>
@@ -18379,7 +18321,7 @@
   <p:cSld>
     <p:spTree>
       <p:nvGrpSpPr>
-        <p:cNvPr id="178" name="Shape 178"/>
+        <p:cNvPr id="177" name="Shape 177"/>
         <p:cNvGrpSpPr/>
         <p:nvPr/>
       </p:nvGrpSpPr>
@@ -18393,7 +18335,7 @@
       </p:grpSpPr>
       <p:pic>
         <p:nvPicPr>
-          <p:cNvPr id="179" name="Google Shape;179;p27"/>
+          <p:cNvPr id="178" name="Google Shape;178;p27"/>
           <p:cNvPicPr preferRelativeResize="0"/>
           <p:nvPr/>
         </p:nvPicPr>
